--- a/宣道詩/(宣道詩142) 彼此代禱.pptx
+++ b/宣道詩/(宣道詩142) 彼此代禱.pptx
@@ -3831,24 +3831,7 @@
                 <a:latin typeface="微軟正黑體" pitchFamily="34" charset="-120"/>
                 <a:ea typeface="微軟正黑體" pitchFamily="34" charset="-120"/>
               </a:rPr>
-              <a:t>彼</a:t>
-            </a:r>
-            <a:r>
-              <a:rPr lang="zh-CN" altLang="en-US" sz="8000" b="1" dirty="0">
-                <a:solidFill>
-                  <a:srgbClr val="000066"/>
-                </a:solidFill>
-                <a:effectLst>
-                  <a:outerShdw blurRad="38100" dist="38100" dir="2700000" algn="tl">
-                    <a:srgbClr val="000000">
-                      <a:alpha val="43137"/>
-                    </a:srgbClr>
-                  </a:outerShdw>
-                </a:effectLst>
-                <a:latin typeface="微軟正黑體" pitchFamily="34" charset="-120"/>
-                <a:ea typeface="微軟正黑體" pitchFamily="34" charset="-120"/>
-              </a:rPr>
-              <a:t>此代禱</a:t>
+              <a:t>彼此代禱</a:t>
             </a:r>
             <a:endParaRPr lang="zh-TW" altLang="en-US" sz="8000" b="1" dirty="0">
               <a:solidFill>
@@ -3994,13 +3977,6 @@
               </a:rPr>
               <a:t>代求永不休</a:t>
             </a:r>
-            <a:endParaRPr lang="zh-CN" altLang="zh-TW" sz="6400" b="1" dirty="0">
-              <a:solidFill>
-                <a:srgbClr val="000066"/>
-              </a:solidFill>
-              <a:latin typeface="Microsoft JhengHei" panose="020B0604030504040204" pitchFamily="34" charset="-120"/>
-              <a:ea typeface="Microsoft JhengHei" panose="020B0604030504040204" pitchFamily="34" charset="-120"/>
-            </a:endParaRPr>
           </a:p>
         </p:txBody>
       </p:sp>
@@ -4133,7 +4109,7 @@
               <a:t>( </a:t>
             </a:r>
             <a:r>
-              <a:rPr lang="en-US" sz="4800" b="1" dirty="0">
+              <a:rPr lang="en-US" sz="4800" b="1" dirty="0" smtClean="0">
                 <a:solidFill>
                   <a:srgbClr val="000066"/>
                 </a:solidFill>
@@ -4146,9 +4122,9 @@
                   <a:srgbClr val="000066"/>
                 </a:solidFill>
               </a:rPr>
-              <a:t>)</a:t>
-            </a:r>
-            <a:endParaRPr lang="vi-VN" sz="4800" b="1" dirty="0">
+              <a:t>/ 4 )</a:t>
+            </a:r>
+            <a:endParaRPr lang="en-US" sz="4800" b="1" dirty="0">
               <a:solidFill>
                 <a:srgbClr val="000066"/>
               </a:solidFill>
@@ -4243,13 +4219,6 @@
               </a:rPr>
               <a:t>同到恩座前取不竭用不盡</a:t>
             </a:r>
-            <a:endParaRPr lang="zh-CN" altLang="zh-TW" sz="6400" b="1" dirty="0">
-              <a:solidFill>
-                <a:srgbClr val="000066"/>
-              </a:solidFill>
-              <a:latin typeface="Microsoft JhengHei" panose="020B0604030504040204" pitchFamily="34" charset="-120"/>
-              <a:ea typeface="Microsoft JhengHei" panose="020B0604030504040204" pitchFamily="34" charset="-120"/>
-            </a:endParaRPr>
           </a:p>
         </p:txBody>
       </p:sp>
@@ -4282,25 +4251,9 @@
                   <a:srgbClr val="000066"/>
                 </a:solidFill>
               </a:rPr>
-              <a:t>( </a:t>
-            </a:r>
-            <a:r>
-              <a:rPr lang="en-US" sz="4800" b="1" dirty="0">
-                <a:solidFill>
-                  <a:srgbClr val="000066"/>
-                </a:solidFill>
-              </a:rPr>
-              <a:t>4 </a:t>
-            </a:r>
-            <a:r>
-              <a:rPr lang="en-US" sz="4800" b="1" dirty="0">
-                <a:solidFill>
-                  <a:srgbClr val="000066"/>
-                </a:solidFill>
-              </a:rPr>
-              <a:t>)</a:t>
-            </a:r>
-            <a:endParaRPr lang="vi-VN" sz="4800" b="1" dirty="0">
+              <a:t>( 4 / 4 )</a:t>
+            </a:r>
+            <a:endParaRPr lang="en-US" sz="4800" b="1" dirty="0">
               <a:solidFill>
                 <a:srgbClr val="000066"/>
               </a:solidFill>
@@ -4435,13 +4388,6 @@
               </a:rPr>
               <a:t>代求永不休</a:t>
             </a:r>
-            <a:endParaRPr lang="zh-CN" altLang="zh-TW" sz="6400" b="1" dirty="0">
-              <a:solidFill>
-                <a:srgbClr val="000066"/>
-              </a:solidFill>
-              <a:latin typeface="Microsoft JhengHei" panose="020B0604030504040204" pitchFamily="34" charset="-120"/>
-              <a:ea typeface="Microsoft JhengHei" panose="020B0604030504040204" pitchFamily="34" charset="-120"/>
-            </a:endParaRPr>
           </a:p>
         </p:txBody>
       </p:sp>
@@ -4571,7 +4517,15 @@
                   <a:srgbClr val="000066"/>
                 </a:solidFill>
               </a:rPr>
-              <a:t>( 1 )</a:t>
+              <a:t>( 1 </a:t>
+            </a:r>
+            <a:r>
+              <a:rPr lang="en-US" sz="4800" b="1" dirty="0" smtClean="0">
+                <a:solidFill>
+                  <a:srgbClr val="000066"/>
+                </a:solidFill>
+              </a:rPr>
+              <a:t>/ 4 )</a:t>
             </a:r>
             <a:endParaRPr lang="vi-VN" sz="4800" b="1" dirty="0">
               <a:solidFill>
@@ -4668,13 +4622,6 @@
               </a:rPr>
               <a:t>果能盡此職必蒙主樂垂允</a:t>
             </a:r>
-            <a:endParaRPr lang="zh-CN" altLang="zh-TW" sz="6400" b="1" dirty="0">
-              <a:solidFill>
-                <a:srgbClr val="000066"/>
-              </a:solidFill>
-              <a:latin typeface="Microsoft JhengHei" panose="020B0604030504040204" pitchFamily="34" charset="-120"/>
-              <a:ea typeface="Microsoft JhengHei" panose="020B0604030504040204" pitchFamily="34" charset="-120"/>
-            </a:endParaRPr>
           </a:p>
         </p:txBody>
       </p:sp>
@@ -4707,7 +4654,7 @@
                   <a:srgbClr val="000066"/>
                 </a:solidFill>
               </a:rPr>
-              <a:t>( 1 )</a:t>
+              <a:t>( 1 / 4 )</a:t>
             </a:r>
             <a:endParaRPr lang="vi-VN" sz="4800" b="1" dirty="0">
               <a:solidFill>
@@ -4844,13 +4791,6 @@
               </a:rPr>
               <a:t>代求永不休</a:t>
             </a:r>
-            <a:endParaRPr lang="zh-CN" altLang="zh-TW" sz="6400" b="1" dirty="0">
-              <a:solidFill>
-                <a:srgbClr val="000066"/>
-              </a:solidFill>
-              <a:latin typeface="Microsoft JhengHei" panose="020B0604030504040204" pitchFamily="34" charset="-120"/>
-              <a:ea typeface="Microsoft JhengHei" panose="020B0604030504040204" pitchFamily="34" charset="-120"/>
-            </a:endParaRPr>
           </a:p>
         </p:txBody>
       </p:sp>
@@ -4983,7 +4923,7 @@
               <a:t>( </a:t>
             </a:r>
             <a:r>
-              <a:rPr lang="en-US" sz="4800" b="1" dirty="0">
+              <a:rPr lang="en-US" sz="4800" b="1" dirty="0" smtClean="0">
                 <a:solidFill>
                   <a:srgbClr val="000066"/>
                 </a:solidFill>
@@ -4996,9 +4936,25 @@
                   <a:srgbClr val="000066"/>
                 </a:solidFill>
               </a:rPr>
+              <a:t>/ </a:t>
+            </a:r>
+            <a:r>
+              <a:rPr lang="en-US" sz="4800" b="1" dirty="0" smtClean="0">
+                <a:solidFill>
+                  <a:srgbClr val="000066"/>
+                </a:solidFill>
+              </a:rPr>
+              <a:t>4 </a:t>
+            </a:r>
+            <a:r>
+              <a:rPr lang="en-US" sz="4800" b="1" dirty="0">
+                <a:solidFill>
+                  <a:srgbClr val="000066"/>
+                </a:solidFill>
+              </a:rPr>
               <a:t>)</a:t>
             </a:r>
-            <a:endParaRPr lang="vi-VN" sz="4800" b="1" dirty="0">
+            <a:endParaRPr lang="en-US" sz="4800" b="1" dirty="0">
               <a:solidFill>
                 <a:srgbClr val="000066"/>
               </a:solidFill>
@@ -5093,13 +5049,6 @@
               </a:rPr>
               <a:t>因與主祈禱同達到父面前</a:t>
             </a:r>
-            <a:endParaRPr lang="zh-CN" altLang="zh-TW" sz="6400" b="1" dirty="0">
-              <a:solidFill>
-                <a:srgbClr val="000066"/>
-              </a:solidFill>
-              <a:latin typeface="Microsoft JhengHei" panose="020B0604030504040204" pitchFamily="34" charset="-120"/>
-              <a:ea typeface="Microsoft JhengHei" panose="020B0604030504040204" pitchFamily="34" charset="-120"/>
-            </a:endParaRPr>
           </a:p>
         </p:txBody>
       </p:sp>
@@ -5132,25 +5081,9 @@
                   <a:srgbClr val="000066"/>
                 </a:solidFill>
               </a:rPr>
-              <a:t>( </a:t>
-            </a:r>
-            <a:r>
-              <a:rPr lang="en-US" sz="4800" b="1" dirty="0">
-                <a:solidFill>
-                  <a:srgbClr val="000066"/>
-                </a:solidFill>
-              </a:rPr>
-              <a:t>2 </a:t>
-            </a:r>
-            <a:r>
-              <a:rPr lang="en-US" sz="4800" b="1" dirty="0">
-                <a:solidFill>
-                  <a:srgbClr val="000066"/>
-                </a:solidFill>
-              </a:rPr>
-              <a:t>)</a:t>
-            </a:r>
-            <a:endParaRPr lang="vi-VN" sz="4800" b="1" dirty="0">
+              <a:t>( 2 / 4 )</a:t>
+            </a:r>
+            <a:endParaRPr lang="en-US" sz="4800" b="1" dirty="0">
               <a:solidFill>
                 <a:srgbClr val="000066"/>
               </a:solidFill>
@@ -5285,13 +5218,6 @@
               </a:rPr>
               <a:t>代求永不休</a:t>
             </a:r>
-            <a:endParaRPr lang="zh-CN" altLang="zh-TW" sz="6400" b="1" dirty="0">
-              <a:solidFill>
-                <a:srgbClr val="000066"/>
-              </a:solidFill>
-              <a:latin typeface="Microsoft JhengHei" panose="020B0604030504040204" pitchFamily="34" charset="-120"/>
-              <a:ea typeface="Microsoft JhengHei" panose="020B0604030504040204" pitchFamily="34" charset="-120"/>
-            </a:endParaRPr>
           </a:p>
         </p:txBody>
       </p:sp>
@@ -5424,7 +5350,7 @@
               <a:t>( </a:t>
             </a:r>
             <a:r>
-              <a:rPr lang="en-US" sz="4800" b="1" dirty="0">
+              <a:rPr lang="en-US" sz="4800" b="1" dirty="0" smtClean="0">
                 <a:solidFill>
                   <a:srgbClr val="000066"/>
                 </a:solidFill>
@@ -5437,9 +5363,9 @@
                   <a:srgbClr val="000066"/>
                 </a:solidFill>
               </a:rPr>
-              <a:t>)</a:t>
-            </a:r>
-            <a:endParaRPr lang="vi-VN" sz="4800" b="1" dirty="0">
+              <a:t>/ 4 )</a:t>
+            </a:r>
+            <a:endParaRPr lang="en-US" sz="4800" b="1" dirty="0">
               <a:solidFill>
                 <a:srgbClr val="000066"/>
               </a:solidFill>
@@ -5534,13 +5460,6 @@
               </a:rPr>
               <a:t>彼此同蒙恩同進步樂無極</a:t>
             </a:r>
-            <a:endParaRPr lang="zh-CN" altLang="zh-TW" sz="6400" b="1" dirty="0">
-              <a:solidFill>
-                <a:srgbClr val="000066"/>
-              </a:solidFill>
-              <a:latin typeface="Microsoft JhengHei" panose="020B0604030504040204" pitchFamily="34" charset="-120"/>
-              <a:ea typeface="Microsoft JhengHei" panose="020B0604030504040204" pitchFamily="34" charset="-120"/>
-            </a:endParaRPr>
           </a:p>
         </p:txBody>
       </p:sp>
@@ -5576,7 +5495,7 @@
               <a:t>( </a:t>
             </a:r>
             <a:r>
-              <a:rPr lang="en-US" sz="4800" b="1" dirty="0">
+              <a:rPr lang="en-US" sz="4800" b="1" dirty="0" smtClean="0">
                 <a:solidFill>
                   <a:srgbClr val="000066"/>
                 </a:solidFill>
@@ -5589,9 +5508,9 @@
                   <a:srgbClr val="000066"/>
                 </a:solidFill>
               </a:rPr>
-              <a:t>)</a:t>
-            </a:r>
-            <a:endParaRPr lang="vi-VN" sz="4800" b="1" dirty="0">
+              <a:t>/ 4 )</a:t>
+            </a:r>
+            <a:endParaRPr lang="en-US" sz="4800" b="1" dirty="0">
               <a:solidFill>
                 <a:srgbClr val="000066"/>
               </a:solidFill>
